--- a/csd310_group2_presentation.pptx
+++ b/csd310_group2_presentation.pptx
@@ -1160,42 +1160,6 @@
         </a:p>
       </dgm:t>
     </dgm:pt>
-    <dgm:pt modelId="{1C66D7FC-A131-4EEA-93F1-C4C24F8770EE}">
-      <dgm:prSet/>
-      <dgm:spPr/>
-      <dgm:t>
-        <a:bodyPr/>
-        <a:lstStyle/>
-        <a:p>
-          <a:r>
-            <a:rPr lang="en-US" dirty="0"/>
-            <a:t>One month can have many new clients</a:t>
-          </a:r>
-        </a:p>
-      </dgm:t>
-    </dgm:pt>
-    <dgm:pt modelId="{1FC38AB9-DADE-4848-9004-00318BC2AD55}" type="parTrans" cxnId="{CF27A097-CB14-495C-9CF0-0D3CDCE22A6C}">
-      <dgm:prSet/>
-      <dgm:spPr/>
-      <dgm:t>
-        <a:bodyPr/>
-        <a:lstStyle/>
-        <a:p>
-          <a:endParaRPr lang="en-US"/>
-        </a:p>
-      </dgm:t>
-    </dgm:pt>
-    <dgm:pt modelId="{E82284D4-1222-4E4C-B673-1941BEE8C3A4}" type="sibTrans" cxnId="{CF27A097-CB14-495C-9CF0-0D3CDCE22A6C}">
-      <dgm:prSet/>
-      <dgm:spPr/>
-      <dgm:t>
-        <a:bodyPr/>
-        <a:lstStyle/>
-        <a:p>
-          <a:endParaRPr lang="en-US"/>
-        </a:p>
-      </dgm:t>
-    </dgm:pt>
     <dgm:pt modelId="{35022780-41F8-4B41-AB75-A4769F559FA2}">
       <dgm:prSet/>
       <dgm:spPr/>
@@ -1241,7 +1205,7 @@
         <a:p>
           <a:r>
             <a:rPr lang="en-US" dirty="0"/>
-            <a:t>One asset includes a client’s accumulation of all their financial assets in one liquid amount.</a:t>
+            <a:t>Each client has a single asset record that represents the client’s total combined asset value.</a:t>
           </a:r>
         </a:p>
       </dgm:t>
@@ -1304,7 +1268,7 @@
         </a:p>
       </dgm:t>
     </dgm:pt>
-    <dgm:pt modelId="{CFE9BE57-D632-7241-9F95-97B99783C281}">
+    <dgm:pt modelId="{1EEB7D61-04B3-0644-8630-8951B2E162F1}">
       <dgm:prSet/>
       <dgm:spPr/>
       <dgm:t>
@@ -1313,18 +1277,32 @@
         <a:p>
           <a:r>
             <a:rPr lang="en-US" dirty="0"/>
-            <a:t>One month can have many transactions</a:t>
+            <a:t>Each client has their own unique identifier</a:t>
           </a:r>
         </a:p>
       </dgm:t>
     </dgm:pt>
-    <dgm:pt modelId="{16F2D5BF-9665-C447-821B-D10880AAC82C}" type="parTrans" cxnId="{2CE8FA24-A9CF-2E40-B53C-978D431B4DC0}">
+    <dgm:pt modelId="{6321C535-10C3-7845-927D-EC54EA93CE84}" type="parTrans" cxnId="{0073A4C7-EAD9-6248-8B18-89ADF98B122A}">
       <dgm:prSet/>
       <dgm:spPr/>
+      <dgm:t>
+        <a:bodyPr/>
+        <a:lstStyle/>
+        <a:p>
+          <a:endParaRPr lang="en-US"/>
+        </a:p>
+      </dgm:t>
     </dgm:pt>
-    <dgm:pt modelId="{E4F815A0-0AC0-4044-AAA0-FA97B3612DF5}" type="sibTrans" cxnId="{2CE8FA24-A9CF-2E40-B53C-978D431B4DC0}">
+    <dgm:pt modelId="{BE527643-2CF1-084C-9046-4B4D5E0948D3}" type="sibTrans" cxnId="{0073A4C7-EAD9-6248-8B18-89ADF98B122A}">
       <dgm:prSet/>
       <dgm:spPr/>
+      <dgm:t>
+        <a:bodyPr/>
+        <a:lstStyle/>
+        <a:p>
+          <a:endParaRPr lang="en-US"/>
+        </a:p>
+      </dgm:t>
     </dgm:pt>
     <dgm:pt modelId="{F5C1A62B-D31D-DA4E-8D6E-BA04CF05CAAD}" type="pres">
       <dgm:prSet presAssocID="{73A056D4-AF2C-4D30-BBEE-28D79FB8B4E0}" presName="Name0" presStyleCnt="0">
@@ -1388,20 +1366,18 @@
   <dgm:cxnLst>
     <dgm:cxn modelId="{19868E01-229D-5C4A-8D17-432A0969D9C9}" type="presOf" srcId="{5CEE4FD7-3958-46E7-915A-DE7C4B96E696}" destId="{D5AB046C-6635-9F41-A03E-24F5584FB596}" srcOrd="0" destOrd="0" presId="urn:microsoft.com/office/officeart/2005/8/layout/hList1"/>
     <dgm:cxn modelId="{7595BA0A-AB7F-CC4F-A0A9-2A911755C654}" type="presOf" srcId="{73A056D4-AF2C-4D30-BBEE-28D79FB8B4E0}" destId="{F5C1A62B-D31D-DA4E-8D6E-BA04CF05CAAD}" srcOrd="0" destOrd="0" presId="urn:microsoft.com/office/officeart/2005/8/layout/hList1"/>
-    <dgm:cxn modelId="{8C52D913-9232-BC4D-8C74-A23E2F5C3FD1}" type="presOf" srcId="{CFE9BE57-D632-7241-9F95-97B99783C281}" destId="{DCCDCC8B-C513-F149-ABF3-6846E2667B42}" srcOrd="0" destOrd="2" presId="urn:microsoft.com/office/officeart/2005/8/layout/hList1"/>
+    <dgm:cxn modelId="{6A13FF16-664A-D64B-9A9E-8C84F59D63F0}" type="presOf" srcId="{1EEB7D61-04B3-0644-8630-8951B2E162F1}" destId="{DCCDCC8B-C513-F149-ABF3-6846E2667B42}" srcOrd="0" destOrd="3" presId="urn:microsoft.com/office/officeart/2005/8/layout/hList1"/>
     <dgm:cxn modelId="{900FDF1D-310A-A54F-83E3-62B7FF6FC456}" type="presOf" srcId="{35022780-41F8-4B41-AB75-A4769F559FA2}" destId="{885CF7B8-567C-2E4D-A431-C9A0EA1667D1}" srcOrd="0" destOrd="0" presId="urn:microsoft.com/office/officeart/2005/8/layout/hList1"/>
     <dgm:cxn modelId="{31454E21-647C-45D5-BE0A-EB5F54F41918}" srcId="{73A056D4-AF2C-4D30-BBEE-28D79FB8B4E0}" destId="{5CEE4FD7-3958-46E7-915A-DE7C4B96E696}" srcOrd="0" destOrd="0" parTransId="{D119AD1A-852E-4CE3-A5CF-85B8F787D328}" sibTransId="{87665EBB-26FA-4AC0-B43D-600AB630C4C4}"/>
     <dgm:cxn modelId="{72CCEF23-757A-4D90-ACC9-73E42B51DE08}" srcId="{5CEE4FD7-3958-46E7-915A-DE7C4B96E696}" destId="{E6800A3F-D592-4F27-9DA0-AE40F911C954}" srcOrd="1" destOrd="0" parTransId="{11C6B798-6A0C-4A63-9A42-2CEF29E0CE9B}" sibTransId="{475FE201-1DC4-4CFE-BCC1-F9D6D12BEF68}"/>
-    <dgm:cxn modelId="{2CE8FA24-A9CF-2E40-B53C-978D431B4DC0}" srcId="{5CEE4FD7-3958-46E7-915A-DE7C4B96E696}" destId="{CFE9BE57-D632-7241-9F95-97B99783C281}" srcOrd="2" destOrd="0" parTransId="{16F2D5BF-9665-C447-821B-D10880AAC82C}" sibTransId="{E4F815A0-0AC0-4044-AAA0-FA97B3612DF5}"/>
     <dgm:cxn modelId="{165A406C-3F64-D449-A36A-5F9AD2545351}" type="presOf" srcId="{45BBDF54-4DE8-41D9-B761-0D916CF1ED9C}" destId="{108E88BC-AB90-BE4B-A05F-1CD22B3CB61F}" srcOrd="0" destOrd="0" presId="urn:microsoft.com/office/officeart/2005/8/layout/hList1"/>
     <dgm:cxn modelId="{E195A37E-2C38-9B47-9F70-56ABE4296FF1}" type="presOf" srcId="{1443706E-3134-40AC-A52B-2E015E42A0A2}" destId="{DCCDCC8B-C513-F149-ABF3-6846E2667B42}" srcOrd="0" destOrd="0" presId="urn:microsoft.com/office/officeart/2005/8/layout/hList1"/>
-    <dgm:cxn modelId="{19909280-FA08-164D-86A4-19ABBDBD4981}" type="presOf" srcId="{41429982-0B3D-E54D-8BE6-3E1C3464F289}" destId="{DCCDCC8B-C513-F149-ABF3-6846E2667B42}" srcOrd="0" destOrd="4" presId="urn:microsoft.com/office/officeart/2005/8/layout/hList1"/>
+    <dgm:cxn modelId="{19909280-FA08-164D-86A4-19ABBDBD4981}" type="presOf" srcId="{41429982-0B3D-E54D-8BE6-3E1C3464F289}" destId="{DCCDCC8B-C513-F149-ABF3-6846E2667B42}" srcOrd="0" destOrd="2" presId="urn:microsoft.com/office/officeart/2005/8/layout/hList1"/>
     <dgm:cxn modelId="{E1CE998B-A7F8-4952-AB44-45CD910DBF07}" srcId="{73A056D4-AF2C-4D30-BBEE-28D79FB8B4E0}" destId="{35022780-41F8-4B41-AB75-A4769F559FA2}" srcOrd="1" destOrd="0" parTransId="{45BA82B0-4227-48D5-9E40-C63A063FF908}" sibTransId="{9FB43B09-B917-470A-921D-3FFA969BBF4F}"/>
     <dgm:cxn modelId="{CC39348E-EC59-43E6-8393-9A86E8A10409}" srcId="{35022780-41F8-4B41-AB75-A4769F559FA2}" destId="{45BBDF54-4DE8-41D9-B761-0D916CF1ED9C}" srcOrd="0" destOrd="0" parTransId="{8BD87A10-7282-4283-B1F5-B35E3046CE64}" sibTransId="{7D9D5B3D-9898-4443-8E24-1246C34487A9}"/>
-    <dgm:cxn modelId="{CF27A097-CB14-495C-9CF0-0D3CDCE22A6C}" srcId="{5CEE4FD7-3958-46E7-915A-DE7C4B96E696}" destId="{1C66D7FC-A131-4EEA-93F1-C4C24F8770EE}" srcOrd="3" destOrd="0" parTransId="{1FC38AB9-DADE-4848-9004-00318BC2AD55}" sibTransId="{E82284D4-1222-4E4C-B673-1941BEE8C3A4}"/>
-    <dgm:cxn modelId="{6571FA9B-B5C4-1D47-B428-C023184119D1}" srcId="{5CEE4FD7-3958-46E7-915A-DE7C4B96E696}" destId="{41429982-0B3D-E54D-8BE6-3E1C3464F289}" srcOrd="4" destOrd="0" parTransId="{1EC01548-9DF1-4240-9937-4A51E10183C3}" sibTransId="{AFD0DEEA-8B87-DF44-ADE2-C41F9EE74234}"/>
+    <dgm:cxn modelId="{6571FA9B-B5C4-1D47-B428-C023184119D1}" srcId="{5CEE4FD7-3958-46E7-915A-DE7C4B96E696}" destId="{41429982-0B3D-E54D-8BE6-3E1C3464F289}" srcOrd="2" destOrd="0" parTransId="{1EC01548-9DF1-4240-9937-4A51E10183C3}" sibTransId="{AFD0DEEA-8B87-DF44-ADE2-C41F9EE74234}"/>
     <dgm:cxn modelId="{C54D0AAA-03F4-4654-BE06-E1CC9C726209}" srcId="{5CEE4FD7-3958-46E7-915A-DE7C4B96E696}" destId="{1443706E-3134-40AC-A52B-2E015E42A0A2}" srcOrd="0" destOrd="0" parTransId="{804ADAEC-C178-474E-AC6B-FBD3C5DCB4A6}" sibTransId="{AA2E3440-8637-4A92-A55E-820BF9B041B9}"/>
-    <dgm:cxn modelId="{62A70EB8-83F6-5546-B33D-13ED4D978F74}" type="presOf" srcId="{1C66D7FC-A131-4EEA-93F1-C4C24F8770EE}" destId="{DCCDCC8B-C513-F149-ABF3-6846E2667B42}" srcOrd="0" destOrd="3" presId="urn:microsoft.com/office/officeart/2005/8/layout/hList1"/>
+    <dgm:cxn modelId="{0073A4C7-EAD9-6248-8B18-89ADF98B122A}" srcId="{5CEE4FD7-3958-46E7-915A-DE7C4B96E696}" destId="{1EEB7D61-04B3-0644-8630-8951B2E162F1}" srcOrd="3" destOrd="0" parTransId="{6321C535-10C3-7845-927D-EC54EA93CE84}" sibTransId="{BE527643-2CF1-084C-9046-4B4D5E0948D3}"/>
     <dgm:cxn modelId="{75B5A5EE-F7A7-BF44-9B1C-69413870E2BB}" type="presOf" srcId="{E6800A3F-D592-4F27-9DA0-AE40F911C954}" destId="{DCCDCC8B-C513-F149-ABF3-6846E2667B42}" srcOrd="0" destOrd="1" presId="urn:microsoft.com/office/officeart/2005/8/layout/hList1"/>
     <dgm:cxn modelId="{8F68E0F0-1519-ED4A-A950-F2F054FFB357}" type="presParOf" srcId="{F5C1A62B-D31D-DA4E-8D6E-BA04CF05CAAD}" destId="{6886ABFE-8AE9-CD4B-888C-EE957BE27590}" srcOrd="0" destOrd="0" presId="urn:microsoft.com/office/officeart/2005/8/layout/hList1"/>
     <dgm:cxn modelId="{1F4D11BE-20EF-FE4C-BD4A-91C640A2F11E}" type="presParOf" srcId="{6886ABFE-8AE9-CD4B-888C-EE957BE27590}" destId="{D5AB046C-6635-9F41-A03E-24F5584FB596}" srcOrd="0" destOrd="0" presId="urn:microsoft.com/office/officeart/2005/8/layout/hList1"/>
@@ -1436,8 +1412,8 @@
       </dsp:nvSpPr>
       <dsp:spPr>
         <a:xfrm>
-          <a:off x="53" y="28990"/>
-          <a:ext cx="5106412" cy="662400"/>
+          <a:off x="53" y="77072"/>
+          <a:ext cx="5106412" cy="777600"/>
         </a:xfrm>
         <a:prstGeom prst="rect">
           <a:avLst/>
@@ -1479,12 +1455,12 @@
         </a:fontRef>
       </dsp:style>
       <dsp:txBody>
-        <a:bodyPr spcFirstLastPara="0" vert="horz" wrap="square" lIns="163576" tIns="93472" rIns="163576" bIns="93472" numCol="1" spcCol="1270" anchor="ctr" anchorCtr="0">
+        <a:bodyPr spcFirstLastPara="0" vert="horz" wrap="square" lIns="192024" tIns="109728" rIns="192024" bIns="109728" numCol="1" spcCol="1270" anchor="ctr" anchorCtr="0">
           <a:noAutofit/>
         </a:bodyPr>
         <a:lstStyle/>
         <a:p>
-          <a:pPr marL="0" lvl="0" indent="0" algn="ctr" defTabSz="1022350">
+          <a:pPr marL="0" lvl="0" indent="0" algn="ctr" defTabSz="1200150">
             <a:lnSpc>
               <a:spcPct val="90000"/>
             </a:lnSpc>
@@ -1497,14 +1473,14 @@
             <a:buNone/>
           </a:pPr>
           <a:r>
-            <a:rPr lang="en-US" sz="2300" kern="1200"/>
+            <a:rPr lang="en-US" sz="2700" kern="1200"/>
             <a:t>Business Rules</a:t>
           </a:r>
         </a:p>
       </dsp:txBody>
       <dsp:txXfrm>
-        <a:off x="53" y="28990"/>
-        <a:ext cx="5106412" cy="662400"/>
+        <a:off x="53" y="77072"/>
+        <a:ext cx="5106412" cy="777600"/>
       </dsp:txXfrm>
     </dsp:sp>
     <dsp:sp modelId="{DCCDCC8B-C513-F149-ABF3-6846E2667B42}">
@@ -1514,8 +1490,8 @@
       </dsp:nvSpPr>
       <dsp:spPr>
         <a:xfrm>
-          <a:off x="53" y="691390"/>
-          <a:ext cx="5106412" cy="3472424"/>
+          <a:off x="53" y="854672"/>
+          <a:ext cx="5106412" cy="3261059"/>
         </a:xfrm>
         <a:prstGeom prst="rect">
           <a:avLst/>
@@ -1559,12 +1535,12 @@
         <a:fontRef idx="minor"/>
       </dsp:style>
       <dsp:txBody>
-        <a:bodyPr spcFirstLastPara="0" vert="horz" wrap="square" lIns="122682" tIns="122682" rIns="163576" bIns="184023" numCol="1" spcCol="1270" anchor="t" anchorCtr="0">
+        <a:bodyPr spcFirstLastPara="0" vert="horz" wrap="square" lIns="144018" tIns="144018" rIns="192024" bIns="216027" numCol="1" spcCol="1270" anchor="t" anchorCtr="0">
           <a:noAutofit/>
         </a:bodyPr>
         <a:lstStyle/>
         <a:p>
-          <a:pPr marL="228600" lvl="1" indent="-228600" algn="l" defTabSz="1022350">
+          <a:pPr marL="228600" lvl="1" indent="-228600" algn="l" defTabSz="1200150">
             <a:lnSpc>
               <a:spcPct val="90000"/>
             </a:lnSpc>
@@ -1577,12 +1553,12 @@
             <a:buChar char="•"/>
           </a:pPr>
           <a:r>
-            <a:rPr lang="en-US" sz="2300" kern="1200"/>
+            <a:rPr lang="en-US" sz="2700" kern="1200"/>
             <a:t>One client can have one asset</a:t>
           </a:r>
         </a:p>
         <a:p>
-          <a:pPr marL="228600" lvl="1" indent="-228600" algn="l" defTabSz="1022350">
+          <a:pPr marL="228600" lvl="1" indent="-228600" algn="l" defTabSz="1200150">
             <a:lnSpc>
               <a:spcPct val="90000"/>
             </a:lnSpc>
@@ -1595,12 +1571,12 @@
             <a:buChar char="•"/>
           </a:pPr>
           <a:r>
-            <a:rPr lang="en-US" sz="2300" kern="1200" dirty="0"/>
+            <a:rPr lang="en-US" sz="2700" kern="1200" dirty="0"/>
             <a:t>One client can have many transactions</a:t>
           </a:r>
         </a:p>
         <a:p>
-          <a:pPr marL="228600" lvl="1" indent="-228600" algn="l" defTabSz="1022350">
+          <a:pPr marL="228600" lvl="1" indent="-228600" algn="l" defTabSz="1200150">
             <a:lnSpc>
               <a:spcPct val="90000"/>
             </a:lnSpc>
@@ -1613,12 +1589,12 @@
             <a:buChar char="•"/>
           </a:pPr>
           <a:r>
-            <a:rPr lang="en-US" sz="2300" kern="1200" dirty="0"/>
-            <a:t>One month can have many transactions</a:t>
+            <a:rPr lang="en-US" sz="2700" kern="1200" dirty="0"/>
+            <a:t>Each transaction is associated with one client</a:t>
           </a:r>
         </a:p>
         <a:p>
-          <a:pPr marL="228600" lvl="1" indent="-228600" algn="l" defTabSz="1022350">
+          <a:pPr marL="228600" lvl="1" indent="-228600" algn="l" defTabSz="1200150">
             <a:lnSpc>
               <a:spcPct val="90000"/>
             </a:lnSpc>
@@ -1631,32 +1607,14 @@
             <a:buChar char="•"/>
           </a:pPr>
           <a:r>
-            <a:rPr lang="en-US" sz="2300" kern="1200" dirty="0"/>
-            <a:t>One month can have many new clients</a:t>
-          </a:r>
-        </a:p>
-        <a:p>
-          <a:pPr marL="228600" lvl="1" indent="-228600" algn="l" defTabSz="1022350">
-            <a:lnSpc>
-              <a:spcPct val="90000"/>
-            </a:lnSpc>
-            <a:spcBef>
-              <a:spcPct val="0"/>
-            </a:spcBef>
-            <a:spcAft>
-              <a:spcPct val="15000"/>
-            </a:spcAft>
-            <a:buChar char="•"/>
-          </a:pPr>
-          <a:r>
-            <a:rPr lang="en-US" sz="2300" kern="1200" dirty="0"/>
-            <a:t>Each transaction is associated with one client</a:t>
+            <a:rPr lang="en-US" sz="2700" kern="1200" dirty="0"/>
+            <a:t>Each client has their own unique identifier</a:t>
           </a:r>
         </a:p>
       </dsp:txBody>
       <dsp:txXfrm>
-        <a:off x="53" y="691390"/>
-        <a:ext cx="5106412" cy="3472424"/>
+        <a:off x="53" y="854672"/>
+        <a:ext cx="5106412" cy="3261059"/>
       </dsp:txXfrm>
     </dsp:sp>
     <dsp:sp modelId="{885CF7B8-567C-2E4D-A431-C9A0EA1667D1}">
@@ -1666,8 +1624,8 @@
       </dsp:nvSpPr>
       <dsp:spPr>
         <a:xfrm>
-          <a:off x="5821363" y="28990"/>
-          <a:ext cx="5106412" cy="662400"/>
+          <a:off x="5821363" y="77072"/>
+          <a:ext cx="5106412" cy="777600"/>
         </a:xfrm>
         <a:prstGeom prst="rect">
           <a:avLst/>
@@ -1709,12 +1667,12 @@
         </a:fontRef>
       </dsp:style>
       <dsp:txBody>
-        <a:bodyPr spcFirstLastPara="0" vert="horz" wrap="square" lIns="163576" tIns="93472" rIns="163576" bIns="93472" numCol="1" spcCol="1270" anchor="ctr" anchorCtr="0">
+        <a:bodyPr spcFirstLastPara="0" vert="horz" wrap="square" lIns="192024" tIns="109728" rIns="192024" bIns="109728" numCol="1" spcCol="1270" anchor="ctr" anchorCtr="0">
           <a:noAutofit/>
         </a:bodyPr>
         <a:lstStyle/>
         <a:p>
-          <a:pPr marL="0" lvl="0" indent="0" algn="ctr" defTabSz="1022350">
+          <a:pPr marL="0" lvl="0" indent="0" algn="ctr" defTabSz="1200150">
             <a:lnSpc>
               <a:spcPct val="90000"/>
             </a:lnSpc>
@@ -1727,14 +1685,14 @@
             <a:buNone/>
           </a:pPr>
           <a:r>
-            <a:rPr lang="en-US" sz="2300" kern="1200"/>
+            <a:rPr lang="en-US" sz="2700" kern="1200"/>
             <a:t>Assumptions</a:t>
           </a:r>
         </a:p>
       </dsp:txBody>
       <dsp:txXfrm>
-        <a:off x="5821363" y="28990"/>
-        <a:ext cx="5106412" cy="662400"/>
+        <a:off x="5821363" y="77072"/>
+        <a:ext cx="5106412" cy="777600"/>
       </dsp:txXfrm>
     </dsp:sp>
     <dsp:sp modelId="{108E88BC-AB90-BE4B-A05F-1CD22B3CB61F}">
@@ -1744,8 +1702,8 @@
       </dsp:nvSpPr>
       <dsp:spPr>
         <a:xfrm>
-          <a:off x="5821363" y="691390"/>
-          <a:ext cx="5106412" cy="3472424"/>
+          <a:off x="5821363" y="854672"/>
+          <a:ext cx="5106412" cy="3261059"/>
         </a:xfrm>
         <a:prstGeom prst="rect">
           <a:avLst/>
@@ -1789,12 +1747,12 @@
         <a:fontRef idx="minor"/>
       </dsp:style>
       <dsp:txBody>
-        <a:bodyPr spcFirstLastPara="0" vert="horz" wrap="square" lIns="122682" tIns="122682" rIns="163576" bIns="184023" numCol="1" spcCol="1270" anchor="t" anchorCtr="0">
+        <a:bodyPr spcFirstLastPara="0" vert="horz" wrap="square" lIns="144018" tIns="144018" rIns="192024" bIns="216027" numCol="1" spcCol="1270" anchor="t" anchorCtr="0">
           <a:noAutofit/>
         </a:bodyPr>
         <a:lstStyle/>
         <a:p>
-          <a:pPr marL="228600" lvl="1" indent="-228600" algn="l" defTabSz="1022350">
+          <a:pPr marL="228600" lvl="1" indent="-228600" algn="l" defTabSz="1200150">
             <a:lnSpc>
               <a:spcPct val="90000"/>
             </a:lnSpc>
@@ -1807,14 +1765,14 @@
             <a:buChar char="•"/>
           </a:pPr>
           <a:r>
-            <a:rPr lang="en-US" sz="2300" kern="1200" dirty="0"/>
-            <a:t>One asset includes a client’s accumulation of all their financial assets in one liquid amount.</a:t>
+            <a:rPr lang="en-US" sz="2700" kern="1200" dirty="0"/>
+            <a:t>Each client has a single asset record that represents the client’s total combined asset value.</a:t>
           </a:r>
         </a:p>
       </dsp:txBody>
       <dsp:txXfrm>
-        <a:off x="5821363" y="691390"/>
-        <a:ext cx="5106412" cy="3472424"/>
+        <a:off x="5821363" y="854672"/>
+        <a:ext cx="5106412" cy="3261059"/>
       </dsp:txXfrm>
     </dsp:sp>
   </dsp:spTree>
@@ -3219,7 +3177,7 @@
           <a:p>
             <a:fld id="{F5AFF713-6187-0C40-82CB-3EE322F7EF8C}" type="datetimeFigureOut">
               <a:rPr lang="en-US" smtClean="0"/>
-              <a:t>12/12/25</a:t>
+              <a:t>12/18/25</a:t>
             </a:fld>
             <a:endParaRPr lang="en-US"/>
           </a:p>
@@ -3417,7 +3375,7 @@
           <a:p>
             <a:fld id="{F5AFF713-6187-0C40-82CB-3EE322F7EF8C}" type="datetimeFigureOut">
               <a:rPr lang="en-US" smtClean="0"/>
-              <a:t>12/12/25</a:t>
+              <a:t>12/18/25</a:t>
             </a:fld>
             <a:endParaRPr lang="en-US"/>
           </a:p>
@@ -3625,7 +3583,7 @@
           <a:p>
             <a:fld id="{F5AFF713-6187-0C40-82CB-3EE322F7EF8C}" type="datetimeFigureOut">
               <a:rPr lang="en-US" smtClean="0"/>
-              <a:t>12/12/25</a:t>
+              <a:t>12/18/25</a:t>
             </a:fld>
             <a:endParaRPr lang="en-US"/>
           </a:p>
@@ -3823,7 +3781,7 @@
           <a:p>
             <a:fld id="{F5AFF713-6187-0C40-82CB-3EE322F7EF8C}" type="datetimeFigureOut">
               <a:rPr lang="en-US" smtClean="0"/>
-              <a:t>12/12/25</a:t>
+              <a:t>12/18/25</a:t>
             </a:fld>
             <a:endParaRPr lang="en-US"/>
           </a:p>
@@ -4098,7 +4056,7 @@
           <a:p>
             <a:fld id="{F5AFF713-6187-0C40-82CB-3EE322F7EF8C}" type="datetimeFigureOut">
               <a:rPr lang="en-US" smtClean="0"/>
-              <a:t>12/12/25</a:t>
+              <a:t>12/18/25</a:t>
             </a:fld>
             <a:endParaRPr lang="en-US"/>
           </a:p>
@@ -4363,7 +4321,7 @@
           <a:p>
             <a:fld id="{F5AFF713-6187-0C40-82CB-3EE322F7EF8C}" type="datetimeFigureOut">
               <a:rPr lang="en-US" smtClean="0"/>
-              <a:t>12/12/25</a:t>
+              <a:t>12/18/25</a:t>
             </a:fld>
             <a:endParaRPr lang="en-US"/>
           </a:p>
@@ -4775,7 +4733,7 @@
           <a:p>
             <a:fld id="{F5AFF713-6187-0C40-82CB-3EE322F7EF8C}" type="datetimeFigureOut">
               <a:rPr lang="en-US" smtClean="0"/>
-              <a:t>12/12/25</a:t>
+              <a:t>12/18/25</a:t>
             </a:fld>
             <a:endParaRPr lang="en-US"/>
           </a:p>
@@ -4916,7 +4874,7 @@
           <a:p>
             <a:fld id="{F5AFF713-6187-0C40-82CB-3EE322F7EF8C}" type="datetimeFigureOut">
               <a:rPr lang="en-US" smtClean="0"/>
-              <a:t>12/12/25</a:t>
+              <a:t>12/18/25</a:t>
             </a:fld>
             <a:endParaRPr lang="en-US"/>
           </a:p>
@@ -5029,7 +4987,7 @@
           <a:p>
             <a:fld id="{F5AFF713-6187-0C40-82CB-3EE322F7EF8C}" type="datetimeFigureOut">
               <a:rPr lang="en-US" smtClean="0"/>
-              <a:t>12/12/25</a:t>
+              <a:t>12/18/25</a:t>
             </a:fld>
             <a:endParaRPr lang="en-US"/>
           </a:p>
@@ -5340,7 +5298,7 @@
           <a:p>
             <a:fld id="{F5AFF713-6187-0C40-82CB-3EE322F7EF8C}" type="datetimeFigureOut">
               <a:rPr lang="en-US" smtClean="0"/>
-              <a:t>12/12/25</a:t>
+              <a:t>12/18/25</a:t>
             </a:fld>
             <a:endParaRPr lang="en-US"/>
           </a:p>
@@ -5628,7 +5586,7 @@
           <a:p>
             <a:fld id="{F5AFF713-6187-0C40-82CB-3EE322F7EF8C}" type="datetimeFigureOut">
               <a:rPr lang="en-US" smtClean="0"/>
-              <a:t>12/12/25</a:t>
+              <a:t>12/18/25</a:t>
             </a:fld>
             <a:endParaRPr lang="en-US"/>
           </a:p>
@@ -5869,7 +5827,7 @@
           <a:p>
             <a:fld id="{F5AFF713-6187-0C40-82CB-3EE322F7EF8C}" type="datetimeFigureOut">
               <a:rPr lang="en-US" smtClean="0"/>
-              <a:t>12/12/25</a:t>
+              <a:t>12/18/25</a:t>
             </a:fld>
             <a:endParaRPr lang="en-US"/>
           </a:p>
@@ -7816,7 +7774,7 @@
             <p:ph idx="1"/>
             <p:extLst>
               <p:ext uri="{D42A27DB-BD31-4B8C-83A1-F6EECF244321}">
-                <p14:modId xmlns:p14="http://schemas.microsoft.com/office/powerpoint/2010/main" val="3550997939"/>
+                <p14:modId xmlns:p14="http://schemas.microsoft.com/office/powerpoint/2010/main" val="1273585496"/>
               </p:ext>
             </p:extLst>
           </p:nvPr>
